--- a/Dynamic_Industry_Elevator_Deck_EN.pptx
+++ b/Dynamic_Industry_Elevator_Deck_EN.pptx
@@ -1681,15 +1681,39 @@
           <a:ln/>
         </p:spPr>
       </p:sp>
-      <p:sp>
-        <p:nvSpPr>
-          <p:cNvPr id="6" name="Text 4"/>
-          <p:cNvSpPr/>
-          <p:nvPr/>
-        </p:nvSpPr>
-        <p:spPr>
-          <a:xfrm>
-            <a:off x="777240" y="685800"/>
+      <p:pic>
+        <p:nvPicPr>
+          <p:cNvPr id="6" name="Image 0" descr="preencoded.png">    </p:cNvPr>
+          <p:cNvPicPr>
+            <a:picLocks noChangeAspect="1"/>
+          </p:cNvPicPr>
+          <p:nvPr/>
+        </p:nvPicPr>
+        <p:blipFill>
+          <a:blip r:embed="rId1"/>
+          <a:stretch>
+            <a:fillRect/>
+          </a:stretch>
+        </p:blipFill>
+        <p:spPr>
+          <a:xfrm>
+            <a:off x="777240" y="676656"/>
+            <a:ext cx="713232" cy="640080"/>
+          </a:xfrm>
+          <a:prstGeom prst="rect">
+            <a:avLst/>
+          </a:prstGeom>
+        </p:spPr>
+      </p:pic>
+      <p:sp>
+        <p:nvSpPr>
+          <p:cNvPr id="7" name="Text 4"/>
+          <p:cNvSpPr/>
+          <p:nvPr/>
+        </p:nvSpPr>
+        <p:spPr>
+          <a:xfrm>
+            <a:off x="1645920" y="713232"/>
             <a:ext cx="5486400" cy="365760"/>
           </a:xfrm>
           <a:prstGeom prst="rect">
@@ -1722,13 +1746,13 @@
       </p:sp>
       <p:sp>
         <p:nvSpPr>
-          <p:cNvPr id="7" name="Text 5"/>
-          <p:cNvSpPr/>
-          <p:nvPr/>
-        </p:nvSpPr>
-        <p:spPr>
-          <a:xfrm>
-            <a:off x="777240" y="1078992"/>
+          <p:cNvPr id="8" name="Text 5"/>
+          <p:cNvSpPr/>
+          <p:nvPr/>
+        </p:nvSpPr>
+        <p:spPr>
+          <a:xfrm>
+            <a:off x="1645920" y="1106424"/>
             <a:ext cx="5486400" cy="274320"/>
           </a:xfrm>
           <a:prstGeom prst="rect">
@@ -1761,7 +1785,7 @@
       </p:sp>
       <p:sp>
         <p:nvSpPr>
-          <p:cNvPr id="8" name="Text 6"/>
+          <p:cNvPr id="9" name="Text 6"/>
           <p:cNvSpPr/>
           <p:nvPr/>
         </p:nvSpPr>
@@ -1843,7 +1867,7 @@
       </p:sp>
       <p:sp>
         <p:nvSpPr>
-          <p:cNvPr id="9" name="Text 7"/>
+          <p:cNvPr id="10" name="Text 7"/>
           <p:cNvSpPr/>
           <p:nvPr/>
         </p:nvSpPr>
@@ -1905,7 +1929,7 @@
       </p:sp>
       <p:sp>
         <p:nvSpPr>
-          <p:cNvPr id="10" name="Shape 8"/>
+          <p:cNvPr id="11" name="Shape 8"/>
           <p:cNvSpPr/>
           <p:nvPr/>
         </p:nvSpPr>
@@ -1927,7 +1951,7 @@
       </p:sp>
       <p:sp>
         <p:nvSpPr>
-          <p:cNvPr id="11" name="Text 9"/>
+          <p:cNvPr id="12" name="Text 9"/>
           <p:cNvSpPr/>
           <p:nvPr/>
         </p:nvSpPr>
@@ -1966,7 +1990,7 @@
       </p:sp>
       <p:sp>
         <p:nvSpPr>
-          <p:cNvPr id="12" name="Text 10"/>
+          <p:cNvPr id="13" name="Text 10"/>
           <p:cNvSpPr/>
           <p:nvPr/>
         </p:nvSpPr>
@@ -2005,7 +2029,7 @@
       </p:sp>
       <p:sp>
         <p:nvSpPr>
-          <p:cNvPr id="13" name="Shape 11"/>
+          <p:cNvPr id="14" name="Shape 11"/>
           <p:cNvSpPr/>
           <p:nvPr/>
         </p:nvSpPr>
@@ -2027,7 +2051,7 @@
       </p:sp>
       <p:sp>
         <p:nvSpPr>
-          <p:cNvPr id="14" name="Text 12"/>
+          <p:cNvPr id="15" name="Text 12"/>
           <p:cNvSpPr/>
           <p:nvPr/>
         </p:nvSpPr>
@@ -2066,7 +2090,7 @@
       </p:sp>
       <p:sp>
         <p:nvSpPr>
-          <p:cNvPr id="15" name="Text 13"/>
+          <p:cNvPr id="16" name="Text 13"/>
           <p:cNvSpPr/>
           <p:nvPr/>
         </p:nvSpPr>
@@ -2105,7 +2129,7 @@
       </p:sp>
       <p:sp>
         <p:nvSpPr>
-          <p:cNvPr id="16" name="Shape 14"/>
+          <p:cNvPr id="17" name="Shape 14"/>
           <p:cNvSpPr/>
           <p:nvPr/>
         </p:nvSpPr>
@@ -2127,7 +2151,7 @@
       </p:sp>
       <p:sp>
         <p:nvSpPr>
-          <p:cNvPr id="17" name="Text 15"/>
+          <p:cNvPr id="18" name="Text 15"/>
           <p:cNvSpPr/>
           <p:nvPr/>
         </p:nvSpPr>
@@ -2166,7 +2190,7 @@
       </p:sp>
       <p:sp>
         <p:nvSpPr>
-          <p:cNvPr id="18" name="Text 16"/>
+          <p:cNvPr id="19" name="Text 16"/>
           <p:cNvSpPr/>
           <p:nvPr/>
         </p:nvSpPr>
@@ -2205,7 +2229,7 @@
       </p:sp>
       <p:sp>
         <p:nvSpPr>
-          <p:cNvPr id="19" name="Shape 17"/>
+          <p:cNvPr id="20" name="Shape 17"/>
           <p:cNvSpPr/>
           <p:nvPr/>
         </p:nvSpPr>
@@ -2227,7 +2251,7 @@
       </p:sp>
       <p:sp>
         <p:nvSpPr>
-          <p:cNvPr id="20" name="Text 18"/>
+          <p:cNvPr id="21" name="Text 18"/>
           <p:cNvSpPr/>
           <p:nvPr/>
         </p:nvSpPr>
@@ -2266,7 +2290,7 @@
       </p:sp>
       <p:sp>
         <p:nvSpPr>
-          <p:cNvPr id="21" name="Text 19"/>
+          <p:cNvPr id="22" name="Text 19"/>
           <p:cNvSpPr/>
           <p:nvPr/>
         </p:nvSpPr>
@@ -2305,7 +2329,7 @@
       </p:sp>
       <p:sp>
         <p:nvSpPr>
-          <p:cNvPr id="22" name="Text 20"/>
+          <p:cNvPr id="23" name="Text 20"/>
           <p:cNvSpPr/>
           <p:nvPr/>
         </p:nvSpPr>
@@ -2374,15 +2398,39 @@
           <a:chExt cx="0" cy="0"/>
         </a:xfrm>
       </p:grpSpPr>
-      <p:sp>
-        <p:nvSpPr>
-          <p:cNvPr id="2" name="Text 0"/>
-          <p:cNvSpPr/>
-          <p:nvPr/>
-        </p:nvSpPr>
-        <p:spPr>
-          <a:xfrm>
-            <a:off x="502920" y="292608"/>
+      <p:pic>
+        <p:nvPicPr>
+          <p:cNvPr id="2" name="Image 0" descr="preencoded.png">    </p:cNvPr>
+          <p:cNvPicPr>
+            <a:picLocks noChangeAspect="1"/>
+          </p:cNvPicPr>
+          <p:nvPr/>
+        </p:nvPicPr>
+        <p:blipFill>
+          <a:blip r:embed="rId1"/>
+          <a:stretch>
+            <a:fillRect/>
+          </a:stretch>
+        </p:blipFill>
+        <p:spPr>
+          <a:xfrm>
+            <a:off x="502920" y="228600"/>
+            <a:ext cx="329184" cy="292608"/>
+          </a:xfrm>
+          <a:prstGeom prst="rect">
+            <a:avLst/>
+          </a:prstGeom>
+        </p:spPr>
+      </p:pic>
+      <p:sp>
+        <p:nvSpPr>
+          <p:cNvPr id="3" name="Text 0"/>
+          <p:cNvSpPr/>
+          <p:nvPr/>
+        </p:nvSpPr>
+        <p:spPr>
+          <a:xfrm>
+            <a:off x="932688" y="292608"/>
             <a:ext cx="3657600" cy="274320"/>
           </a:xfrm>
           <a:prstGeom prst="rect">
@@ -2415,7 +2463,7 @@
       </p:sp>
       <p:sp>
         <p:nvSpPr>
-          <p:cNvPr id="3" name="Text 1"/>
+          <p:cNvPr id="4" name="Text 1"/>
           <p:cNvSpPr/>
           <p:nvPr/>
         </p:nvSpPr>
@@ -2454,7 +2502,7 @@
       </p:sp>
       <p:sp>
         <p:nvSpPr>
-          <p:cNvPr id="4" name="Text 2"/>
+          <p:cNvPr id="5" name="Text 2"/>
           <p:cNvSpPr/>
           <p:nvPr/>
         </p:nvSpPr>
@@ -2493,7 +2541,7 @@
       </p:sp>
       <p:sp>
         <p:nvSpPr>
-          <p:cNvPr id="5" name="Shape 3"/>
+          <p:cNvPr id="6" name="Shape 3"/>
           <p:cNvSpPr/>
           <p:nvPr/>
         </p:nvSpPr>
@@ -2527,7 +2575,7 @@
       </p:sp>
       <p:sp>
         <p:nvSpPr>
-          <p:cNvPr id="6" name="Text 4"/>
+          <p:cNvPr id="7" name="Text 4"/>
           <p:cNvSpPr/>
           <p:nvPr/>
         </p:nvSpPr>
@@ -2566,7 +2614,7 @@
       </p:sp>
       <p:sp>
         <p:nvSpPr>
-          <p:cNvPr id="7" name="Text 5"/>
+          <p:cNvPr id="8" name="Text 5"/>
           <p:cNvSpPr/>
           <p:nvPr/>
         </p:nvSpPr>
@@ -2622,7 +2670,7 @@
       </p:sp>
       <p:sp>
         <p:nvSpPr>
-          <p:cNvPr id="8" name="Shape 6"/>
+          <p:cNvPr id="9" name="Shape 6"/>
           <p:cNvSpPr/>
           <p:nvPr/>
         </p:nvSpPr>
@@ -2656,7 +2704,7 @@
       </p:sp>
       <p:sp>
         <p:nvSpPr>
-          <p:cNvPr id="9" name="Text 7"/>
+          <p:cNvPr id="10" name="Text 7"/>
           <p:cNvSpPr/>
           <p:nvPr/>
         </p:nvSpPr>
@@ -2695,7 +2743,7 @@
       </p:sp>
       <p:sp>
         <p:nvSpPr>
-          <p:cNvPr id="10" name="Text 8"/>
+          <p:cNvPr id="11" name="Text 8"/>
           <p:cNvSpPr/>
           <p:nvPr/>
         </p:nvSpPr>
@@ -2751,7 +2799,7 @@
       </p:sp>
       <p:sp>
         <p:nvSpPr>
-          <p:cNvPr id="11" name="Shape 9"/>
+          <p:cNvPr id="12" name="Shape 9"/>
           <p:cNvSpPr/>
           <p:nvPr/>
         </p:nvSpPr>
@@ -2785,7 +2833,7 @@
       </p:sp>
       <p:sp>
         <p:nvSpPr>
-          <p:cNvPr id="12" name="Text 10"/>
+          <p:cNvPr id="13" name="Text 10"/>
           <p:cNvSpPr/>
           <p:nvPr/>
         </p:nvSpPr>
@@ -2824,7 +2872,7 @@
       </p:sp>
       <p:sp>
         <p:nvSpPr>
-          <p:cNvPr id="13" name="Text 11"/>
+          <p:cNvPr id="14" name="Text 11"/>
           <p:cNvSpPr/>
           <p:nvPr/>
         </p:nvSpPr>
@@ -2880,7 +2928,7 @@
       </p:sp>
       <p:sp>
         <p:nvSpPr>
-          <p:cNvPr id="14" name="Shape 12"/>
+          <p:cNvPr id="15" name="Shape 12"/>
           <p:cNvSpPr/>
           <p:nvPr/>
         </p:nvSpPr>
@@ -2907,7 +2955,7 @@
       </p:sp>
       <p:sp>
         <p:nvSpPr>
-          <p:cNvPr id="15" name="Text 13"/>
+          <p:cNvPr id="16" name="Text 13"/>
           <p:cNvSpPr/>
           <p:nvPr/>
         </p:nvSpPr>
@@ -2946,7 +2994,7 @@
       </p:sp>
       <p:sp>
         <p:nvSpPr>
-          <p:cNvPr id="16" name="Shape 14"/>
+          <p:cNvPr id="17" name="Shape 14"/>
           <p:cNvSpPr/>
           <p:nvPr/>
         </p:nvSpPr>
@@ -2966,7 +3014,7 @@
       </p:sp>
       <p:sp>
         <p:nvSpPr>
-          <p:cNvPr id="17" name="Text 15"/>
+          <p:cNvPr id="18" name="Text 15"/>
           <p:cNvSpPr/>
           <p:nvPr/>
         </p:nvSpPr>
@@ -3025,7 +3073,7 @@
       </p:sp>
       <p:sp>
         <p:nvSpPr>
-          <p:cNvPr id="18" name="Shape 16"/>
+          <p:cNvPr id="19" name="Shape 16"/>
           <p:cNvSpPr/>
           <p:nvPr/>
         </p:nvSpPr>
@@ -3045,7 +3093,7 @@
       </p:sp>
       <p:sp>
         <p:nvSpPr>
-          <p:cNvPr id="19" name="Text 17"/>
+          <p:cNvPr id="20" name="Text 17"/>
           <p:cNvSpPr/>
           <p:nvPr/>
         </p:nvSpPr>
@@ -3104,7 +3152,7 @@
       </p:sp>
       <p:sp>
         <p:nvSpPr>
-          <p:cNvPr id="20" name="Shape 18"/>
+          <p:cNvPr id="21" name="Shape 18"/>
           <p:cNvSpPr/>
           <p:nvPr/>
         </p:nvSpPr>
@@ -3124,7 +3172,7 @@
       </p:sp>
       <p:sp>
         <p:nvSpPr>
-          <p:cNvPr id="21" name="Text 19"/>
+          <p:cNvPr id="22" name="Text 19"/>
           <p:cNvSpPr/>
           <p:nvPr/>
         </p:nvSpPr>
@@ -3183,7 +3231,7 @@
       </p:sp>
       <p:sp>
         <p:nvSpPr>
-          <p:cNvPr id="22" name="Shape 20"/>
+          <p:cNvPr id="23" name="Shape 20"/>
           <p:cNvSpPr/>
           <p:nvPr/>
         </p:nvSpPr>
@@ -3205,7 +3253,7 @@
       </p:sp>
       <p:sp>
         <p:nvSpPr>
-          <p:cNvPr id="23" name="Text 21"/>
+          <p:cNvPr id="24" name="Text 21"/>
           <p:cNvSpPr/>
           <p:nvPr/>
         </p:nvSpPr>
@@ -3244,7 +3292,7 @@
       </p:sp>
       <p:sp>
         <p:nvSpPr>
-          <p:cNvPr id="24" name="Text 22"/>
+          <p:cNvPr id="25" name="Text 22"/>
           <p:cNvSpPr/>
           <p:nvPr/>
         </p:nvSpPr>
@@ -3312,7 +3360,7 @@
       </p:sp>
       <p:sp>
         <p:nvSpPr>
-          <p:cNvPr id="25" name="Text 23"/>
+          <p:cNvPr id="26" name="Text 23"/>
           <p:cNvSpPr/>
           <p:nvPr/>
         </p:nvSpPr>
@@ -3351,7 +3399,7 @@
       </p:sp>
       <p:sp>
         <p:nvSpPr>
-          <p:cNvPr id="26" name="Text 24"/>
+          <p:cNvPr id="27" name="Text 24"/>
           <p:cNvSpPr/>
           <p:nvPr/>
         </p:nvSpPr>
@@ -3420,15 +3468,39 @@
           <a:chExt cx="0" cy="0"/>
         </a:xfrm>
       </p:grpSpPr>
-      <p:sp>
-        <p:nvSpPr>
-          <p:cNvPr id="2" name="Text 0"/>
-          <p:cNvSpPr/>
-          <p:nvPr/>
-        </p:nvSpPr>
-        <p:spPr>
-          <a:xfrm>
-            <a:off x="502920" y="292608"/>
+      <p:pic>
+        <p:nvPicPr>
+          <p:cNvPr id="2" name="Image 0" descr="preencoded.png">    </p:cNvPr>
+          <p:cNvPicPr>
+            <a:picLocks noChangeAspect="1"/>
+          </p:cNvPicPr>
+          <p:nvPr/>
+        </p:nvPicPr>
+        <p:blipFill>
+          <a:blip r:embed="rId1"/>
+          <a:stretch>
+            <a:fillRect/>
+          </a:stretch>
+        </p:blipFill>
+        <p:spPr>
+          <a:xfrm>
+            <a:off x="502920" y="228600"/>
+            <a:ext cx="329184" cy="292608"/>
+          </a:xfrm>
+          <a:prstGeom prst="rect">
+            <a:avLst/>
+          </a:prstGeom>
+        </p:spPr>
+      </p:pic>
+      <p:sp>
+        <p:nvSpPr>
+          <p:cNvPr id="3" name="Text 0"/>
+          <p:cNvSpPr/>
+          <p:nvPr/>
+        </p:nvSpPr>
+        <p:spPr>
+          <a:xfrm>
+            <a:off x="932688" y="292608"/>
             <a:ext cx="3657600" cy="274320"/>
           </a:xfrm>
           <a:prstGeom prst="rect">
@@ -3461,7 +3533,7 @@
       </p:sp>
       <p:sp>
         <p:nvSpPr>
-          <p:cNvPr id="3" name="Text 1"/>
+          <p:cNvPr id="4" name="Text 1"/>
           <p:cNvSpPr/>
           <p:nvPr/>
         </p:nvSpPr>
@@ -3500,7 +3572,7 @@
       </p:sp>
       <p:sp>
         <p:nvSpPr>
-          <p:cNvPr id="4" name="Text 2"/>
+          <p:cNvPr id="5" name="Text 2"/>
           <p:cNvSpPr/>
           <p:nvPr/>
         </p:nvSpPr>
@@ -3539,7 +3611,7 @@
       </p:sp>
       <p:sp>
         <p:nvSpPr>
-          <p:cNvPr id="5" name="Shape 3"/>
+          <p:cNvPr id="6" name="Shape 3"/>
           <p:cNvSpPr/>
           <p:nvPr/>
         </p:nvSpPr>
@@ -3566,7 +3638,7 @@
       </p:sp>
       <p:sp>
         <p:nvSpPr>
-          <p:cNvPr id="6" name="Text 4"/>
+          <p:cNvPr id="7" name="Text 4"/>
           <p:cNvSpPr/>
           <p:nvPr/>
         </p:nvSpPr>
@@ -3605,7 +3677,7 @@
       </p:sp>
       <p:sp>
         <p:nvSpPr>
-          <p:cNvPr id="7" name="Text 5"/>
+          <p:cNvPr id="8" name="Text 5"/>
           <p:cNvSpPr/>
           <p:nvPr/>
         </p:nvSpPr>
@@ -3644,7 +3716,7 @@
       </p:sp>
       <p:sp>
         <p:nvSpPr>
-          <p:cNvPr id="8" name="Shape 6"/>
+          <p:cNvPr id="9" name="Shape 6"/>
           <p:cNvSpPr/>
           <p:nvPr/>
         </p:nvSpPr>
@@ -3666,7 +3738,7 @@
       </p:sp>
       <p:sp>
         <p:nvSpPr>
-          <p:cNvPr id="9" name="Text 7"/>
+          <p:cNvPr id="10" name="Text 7"/>
           <p:cNvSpPr/>
           <p:nvPr/>
         </p:nvSpPr>
@@ -3705,7 +3777,7 @@
       </p:sp>
       <p:sp>
         <p:nvSpPr>
-          <p:cNvPr id="10" name="Shape 8"/>
+          <p:cNvPr id="11" name="Shape 8"/>
           <p:cNvSpPr/>
           <p:nvPr/>
         </p:nvSpPr>
@@ -3727,7 +3799,7 @@
       </p:sp>
       <p:sp>
         <p:nvSpPr>
-          <p:cNvPr id="11" name="Text 9"/>
+          <p:cNvPr id="12" name="Text 9"/>
           <p:cNvSpPr/>
           <p:nvPr/>
         </p:nvSpPr>
@@ -3766,7 +3838,7 @@
       </p:sp>
       <p:sp>
         <p:nvSpPr>
-          <p:cNvPr id="12" name="Text 10"/>
+          <p:cNvPr id="13" name="Text 10"/>
           <p:cNvSpPr/>
           <p:nvPr/>
         </p:nvSpPr>
@@ -3805,7 +3877,7 @@
       </p:sp>
       <p:sp>
         <p:nvSpPr>
-          <p:cNvPr id="13" name="Shape 11"/>
+          <p:cNvPr id="14" name="Shape 11"/>
           <p:cNvSpPr/>
           <p:nvPr/>
         </p:nvSpPr>
@@ -3827,7 +3899,7 @@
       </p:sp>
       <p:sp>
         <p:nvSpPr>
-          <p:cNvPr id="14" name="Text 12"/>
+          <p:cNvPr id="15" name="Text 12"/>
           <p:cNvSpPr/>
           <p:nvPr/>
         </p:nvSpPr>
@@ -3866,7 +3938,7 @@
       </p:sp>
       <p:sp>
         <p:nvSpPr>
-          <p:cNvPr id="15" name="Shape 13"/>
+          <p:cNvPr id="16" name="Shape 13"/>
           <p:cNvSpPr/>
           <p:nvPr/>
         </p:nvSpPr>
@@ -3888,7 +3960,7 @@
       </p:sp>
       <p:sp>
         <p:nvSpPr>
-          <p:cNvPr id="16" name="Text 14"/>
+          <p:cNvPr id="17" name="Text 14"/>
           <p:cNvSpPr/>
           <p:nvPr/>
         </p:nvSpPr>
@@ -3927,7 +3999,7 @@
       </p:sp>
       <p:sp>
         <p:nvSpPr>
-          <p:cNvPr id="17" name="Text 15"/>
+          <p:cNvPr id="18" name="Text 15"/>
           <p:cNvSpPr/>
           <p:nvPr/>
         </p:nvSpPr>
@@ -3966,7 +4038,7 @@
       </p:sp>
       <p:sp>
         <p:nvSpPr>
-          <p:cNvPr id="18" name="Shape 16"/>
+          <p:cNvPr id="19" name="Shape 16"/>
           <p:cNvSpPr/>
           <p:nvPr/>
         </p:nvSpPr>
@@ -3988,7 +4060,7 @@
       </p:sp>
       <p:sp>
         <p:nvSpPr>
-          <p:cNvPr id="19" name="Text 17"/>
+          <p:cNvPr id="20" name="Text 17"/>
           <p:cNvSpPr/>
           <p:nvPr/>
         </p:nvSpPr>
@@ -4027,7 +4099,7 @@
       </p:sp>
       <p:sp>
         <p:nvSpPr>
-          <p:cNvPr id="20" name="Shape 18"/>
+          <p:cNvPr id="21" name="Shape 18"/>
           <p:cNvSpPr/>
           <p:nvPr/>
         </p:nvSpPr>
@@ -4049,7 +4121,7 @@
       </p:sp>
       <p:sp>
         <p:nvSpPr>
-          <p:cNvPr id="21" name="Text 19"/>
+          <p:cNvPr id="22" name="Text 19"/>
           <p:cNvSpPr/>
           <p:nvPr/>
         </p:nvSpPr>
@@ -4088,7 +4160,7 @@
       </p:sp>
       <p:sp>
         <p:nvSpPr>
-          <p:cNvPr id="22" name="Text 20"/>
+          <p:cNvPr id="23" name="Text 20"/>
           <p:cNvSpPr/>
           <p:nvPr/>
         </p:nvSpPr>
@@ -4127,7 +4199,7 @@
       </p:sp>
       <p:sp>
         <p:nvSpPr>
-          <p:cNvPr id="23" name="Shape 21"/>
+          <p:cNvPr id="24" name="Shape 21"/>
           <p:cNvSpPr/>
           <p:nvPr/>
         </p:nvSpPr>
@@ -4149,7 +4221,7 @@
       </p:sp>
       <p:sp>
         <p:nvSpPr>
-          <p:cNvPr id="24" name="Text 22"/>
+          <p:cNvPr id="25" name="Text 22"/>
           <p:cNvSpPr/>
           <p:nvPr/>
         </p:nvSpPr>
@@ -4188,7 +4260,7 @@
       </p:sp>
       <p:sp>
         <p:nvSpPr>
-          <p:cNvPr id="25" name="Shape 23"/>
+          <p:cNvPr id="26" name="Shape 23"/>
           <p:cNvSpPr/>
           <p:nvPr/>
         </p:nvSpPr>
@@ -4210,7 +4282,7 @@
       </p:sp>
       <p:sp>
         <p:nvSpPr>
-          <p:cNvPr id="26" name="Text 24"/>
+          <p:cNvPr id="27" name="Text 24"/>
           <p:cNvSpPr/>
           <p:nvPr/>
         </p:nvSpPr>
@@ -4249,7 +4321,7 @@
       </p:sp>
       <p:sp>
         <p:nvSpPr>
-          <p:cNvPr id="27" name="Shape 25"/>
+          <p:cNvPr id="28" name="Shape 25"/>
           <p:cNvSpPr/>
           <p:nvPr/>
         </p:nvSpPr>
@@ -4276,7 +4348,7 @@
       </p:sp>
       <p:sp>
         <p:nvSpPr>
-          <p:cNvPr id="28" name="Text 26"/>
+          <p:cNvPr id="29" name="Text 26"/>
           <p:cNvSpPr/>
           <p:nvPr/>
         </p:nvSpPr>
@@ -4315,7 +4387,7 @@
       </p:sp>
       <p:graphicFrame>
         <p:nvGraphicFramePr>
-          <p:cNvPr id="29" name="Chart 0" descr=""/>
+          <p:cNvPr id="30" name="Chart 0" descr=""/>
           <p:cNvGraphicFramePr/>
           <p:nvPr/>
         </p:nvGraphicFramePr>
@@ -4325,13 +4397,13 @@
         </p:xfrm>
         <a:graphic xmlns:a="http://schemas.openxmlformats.org/drawingml/2006/main">
           <a:graphicData uri="http://schemas.openxmlformats.org/drawingml/2006/chart">
-            <c:chart xmlns:c="http://schemas.openxmlformats.org/drawingml/2006/chart" r:id="rId1"/>
+            <c:chart xmlns:c="http://schemas.openxmlformats.org/drawingml/2006/chart" r:id="rId2"/>
           </a:graphicData>
         </a:graphic>
       </p:graphicFrame>
       <p:sp>
         <p:nvSpPr>
-          <p:cNvPr id="30" name="Shape 27"/>
+          <p:cNvPr id="31" name="Shape 27"/>
           <p:cNvSpPr/>
           <p:nvPr/>
         </p:nvSpPr>
@@ -4353,7 +4425,7 @@
       </p:sp>
       <p:sp>
         <p:nvSpPr>
-          <p:cNvPr id="31" name="Text 28"/>
+          <p:cNvPr id="32" name="Text 28"/>
           <p:cNvSpPr/>
           <p:nvPr/>
         </p:nvSpPr>
@@ -4446,7 +4518,7 @@
       </p:sp>
       <p:sp>
         <p:nvSpPr>
-          <p:cNvPr id="32" name="Text 29"/>
+          <p:cNvPr id="33" name="Text 29"/>
           <p:cNvSpPr/>
           <p:nvPr/>
         </p:nvSpPr>
@@ -4485,7 +4557,7 @@
       </p:sp>
       <p:sp>
         <p:nvSpPr>
-          <p:cNvPr id="33" name="Text 30"/>
+          <p:cNvPr id="34" name="Text 30"/>
           <p:cNvSpPr/>
           <p:nvPr/>
         </p:nvSpPr>
@@ -4554,15 +4626,39 @@
           <a:chExt cx="0" cy="0"/>
         </a:xfrm>
       </p:grpSpPr>
-      <p:sp>
-        <p:nvSpPr>
-          <p:cNvPr id="2" name="Text 0"/>
-          <p:cNvSpPr/>
-          <p:nvPr/>
-        </p:nvSpPr>
-        <p:spPr>
-          <a:xfrm>
-            <a:off x="502920" y="292608"/>
+      <p:pic>
+        <p:nvPicPr>
+          <p:cNvPr id="2" name="Image 0" descr="preencoded.png">    </p:cNvPr>
+          <p:cNvPicPr>
+            <a:picLocks noChangeAspect="1"/>
+          </p:cNvPicPr>
+          <p:nvPr/>
+        </p:nvPicPr>
+        <p:blipFill>
+          <a:blip r:embed="rId1"/>
+          <a:stretch>
+            <a:fillRect/>
+          </a:stretch>
+        </p:blipFill>
+        <p:spPr>
+          <a:xfrm>
+            <a:off x="502920" y="228600"/>
+            <a:ext cx="329184" cy="292608"/>
+          </a:xfrm>
+          <a:prstGeom prst="rect">
+            <a:avLst/>
+          </a:prstGeom>
+        </p:spPr>
+      </p:pic>
+      <p:sp>
+        <p:nvSpPr>
+          <p:cNvPr id="3" name="Text 0"/>
+          <p:cNvSpPr/>
+          <p:nvPr/>
+        </p:nvSpPr>
+        <p:spPr>
+          <a:xfrm>
+            <a:off x="932688" y="292608"/>
             <a:ext cx="3657600" cy="274320"/>
           </a:xfrm>
           <a:prstGeom prst="rect">
@@ -4595,7 +4691,7 @@
       </p:sp>
       <p:sp>
         <p:nvSpPr>
-          <p:cNvPr id="3" name="Text 1"/>
+          <p:cNvPr id="4" name="Text 1"/>
           <p:cNvSpPr/>
           <p:nvPr/>
         </p:nvSpPr>
@@ -4634,7 +4730,7 @@
       </p:sp>
       <p:sp>
         <p:nvSpPr>
-          <p:cNvPr id="4" name="Text 2"/>
+          <p:cNvPr id="5" name="Text 2"/>
           <p:cNvSpPr/>
           <p:nvPr/>
         </p:nvSpPr>
@@ -4673,7 +4769,7 @@
       </p:sp>
       <p:sp>
         <p:nvSpPr>
-          <p:cNvPr id="5" name="Shape 3"/>
+          <p:cNvPr id="6" name="Shape 3"/>
           <p:cNvSpPr/>
           <p:nvPr/>
         </p:nvSpPr>
@@ -4707,7 +4803,7 @@
       </p:sp>
       <p:sp>
         <p:nvSpPr>
-          <p:cNvPr id="6" name="Text 4"/>
+          <p:cNvPr id="7" name="Text 4"/>
           <p:cNvSpPr/>
           <p:nvPr/>
         </p:nvSpPr>
@@ -4746,7 +4842,7 @@
       </p:sp>
       <p:sp>
         <p:nvSpPr>
-          <p:cNvPr id="7" name="Text 5"/>
+          <p:cNvPr id="8" name="Text 5"/>
           <p:cNvSpPr/>
           <p:nvPr/>
         </p:nvSpPr>
@@ -4802,7 +4898,7 @@
       </p:sp>
       <p:sp>
         <p:nvSpPr>
-          <p:cNvPr id="8" name="Shape 6"/>
+          <p:cNvPr id="9" name="Shape 6"/>
           <p:cNvSpPr/>
           <p:nvPr/>
         </p:nvSpPr>
@@ -4836,7 +4932,7 @@
       </p:sp>
       <p:sp>
         <p:nvSpPr>
-          <p:cNvPr id="9" name="Text 7"/>
+          <p:cNvPr id="10" name="Text 7"/>
           <p:cNvSpPr/>
           <p:nvPr/>
         </p:nvSpPr>
@@ -4875,7 +4971,7 @@
       </p:sp>
       <p:sp>
         <p:nvSpPr>
-          <p:cNvPr id="10" name="Text 8"/>
+          <p:cNvPr id="11" name="Text 8"/>
           <p:cNvSpPr/>
           <p:nvPr/>
         </p:nvSpPr>
@@ -4931,7 +5027,7 @@
       </p:sp>
       <p:sp>
         <p:nvSpPr>
-          <p:cNvPr id="11" name="Shape 9"/>
+          <p:cNvPr id="12" name="Shape 9"/>
           <p:cNvSpPr/>
           <p:nvPr/>
         </p:nvSpPr>
@@ -4965,7 +5061,7 @@
       </p:sp>
       <p:sp>
         <p:nvSpPr>
-          <p:cNvPr id="12" name="Text 10"/>
+          <p:cNvPr id="13" name="Text 10"/>
           <p:cNvSpPr/>
           <p:nvPr/>
         </p:nvSpPr>
@@ -5004,7 +5100,7 @@
       </p:sp>
       <p:sp>
         <p:nvSpPr>
-          <p:cNvPr id="13" name="Text 11"/>
+          <p:cNvPr id="14" name="Text 11"/>
           <p:cNvSpPr/>
           <p:nvPr/>
         </p:nvSpPr>
@@ -5060,7 +5156,7 @@
       </p:sp>
       <p:sp>
         <p:nvSpPr>
-          <p:cNvPr id="14" name="Shape 12"/>
+          <p:cNvPr id="15" name="Shape 12"/>
           <p:cNvSpPr/>
           <p:nvPr/>
         </p:nvSpPr>
@@ -5094,7 +5190,7 @@
       </p:sp>
       <p:sp>
         <p:nvSpPr>
-          <p:cNvPr id="15" name="Text 13"/>
+          <p:cNvPr id="16" name="Text 13"/>
           <p:cNvSpPr/>
           <p:nvPr/>
         </p:nvSpPr>
@@ -5133,7 +5229,7 @@
       </p:sp>
       <p:sp>
         <p:nvSpPr>
-          <p:cNvPr id="16" name="Text 14"/>
+          <p:cNvPr id="17" name="Text 14"/>
           <p:cNvSpPr/>
           <p:nvPr/>
         </p:nvSpPr>
@@ -5189,7 +5285,7 @@
       </p:sp>
       <p:sp>
         <p:nvSpPr>
-          <p:cNvPr id="17" name="Shape 15"/>
+          <p:cNvPr id="18" name="Shape 15"/>
           <p:cNvSpPr/>
           <p:nvPr/>
         </p:nvSpPr>
@@ -5216,7 +5312,7 @@
       </p:sp>
       <p:sp>
         <p:nvSpPr>
-          <p:cNvPr id="18" name="Text 16"/>
+          <p:cNvPr id="19" name="Text 16"/>
           <p:cNvSpPr/>
           <p:nvPr/>
         </p:nvSpPr>
@@ -5255,7 +5351,7 @@
       </p:sp>
       <p:sp>
         <p:nvSpPr>
-          <p:cNvPr id="19" name="Shape 17"/>
+          <p:cNvPr id="20" name="Shape 17"/>
           <p:cNvSpPr/>
           <p:nvPr/>
         </p:nvSpPr>
@@ -5275,7 +5371,7 @@
       </p:sp>
       <p:sp>
         <p:nvSpPr>
-          <p:cNvPr id="20" name="Text 18"/>
+          <p:cNvPr id="21" name="Text 18"/>
           <p:cNvSpPr/>
           <p:nvPr/>
         </p:nvSpPr>
@@ -5314,7 +5410,7 @@
       </p:sp>
       <p:sp>
         <p:nvSpPr>
-          <p:cNvPr id="21" name="Text 19"/>
+          <p:cNvPr id="22" name="Text 19"/>
           <p:cNvSpPr/>
           <p:nvPr/>
         </p:nvSpPr>
@@ -5373,7 +5469,7 @@
       </p:sp>
       <p:sp>
         <p:nvSpPr>
-          <p:cNvPr id="22" name="Shape 20"/>
+          <p:cNvPr id="23" name="Shape 20"/>
           <p:cNvSpPr/>
           <p:nvPr/>
         </p:nvSpPr>
@@ -5393,7 +5489,7 @@
       </p:sp>
       <p:sp>
         <p:nvSpPr>
-          <p:cNvPr id="23" name="Text 21"/>
+          <p:cNvPr id="24" name="Text 21"/>
           <p:cNvSpPr/>
           <p:nvPr/>
         </p:nvSpPr>
@@ -5432,7 +5528,7 @@
       </p:sp>
       <p:sp>
         <p:nvSpPr>
-          <p:cNvPr id="24" name="Text 22"/>
+          <p:cNvPr id="25" name="Text 22"/>
           <p:cNvSpPr/>
           <p:nvPr/>
         </p:nvSpPr>
@@ -5491,7 +5587,7 @@
       </p:sp>
       <p:sp>
         <p:nvSpPr>
-          <p:cNvPr id="25" name="Shape 23"/>
+          <p:cNvPr id="26" name="Shape 23"/>
           <p:cNvSpPr/>
           <p:nvPr/>
         </p:nvSpPr>
@@ -5511,7 +5607,7 @@
       </p:sp>
       <p:sp>
         <p:nvSpPr>
-          <p:cNvPr id="26" name="Text 24"/>
+          <p:cNvPr id="27" name="Text 24"/>
           <p:cNvSpPr/>
           <p:nvPr/>
         </p:nvSpPr>
@@ -5550,7 +5646,7 @@
       </p:sp>
       <p:sp>
         <p:nvSpPr>
-          <p:cNvPr id="27" name="Text 25"/>
+          <p:cNvPr id="28" name="Text 25"/>
           <p:cNvSpPr/>
           <p:nvPr/>
         </p:nvSpPr>
@@ -5609,7 +5705,7 @@
       </p:sp>
       <p:sp>
         <p:nvSpPr>
-          <p:cNvPr id="28" name="Shape 26"/>
+          <p:cNvPr id="29" name="Shape 26"/>
           <p:cNvSpPr/>
           <p:nvPr/>
         </p:nvSpPr>
@@ -5631,7 +5727,7 @@
       </p:sp>
       <p:sp>
         <p:nvSpPr>
-          <p:cNvPr id="29" name="Text 27"/>
+          <p:cNvPr id="30" name="Text 27"/>
           <p:cNvSpPr/>
           <p:nvPr/>
         </p:nvSpPr>
@@ -5670,7 +5766,7 @@
       </p:sp>
       <p:sp>
         <p:nvSpPr>
-          <p:cNvPr id="30" name="Text 28"/>
+          <p:cNvPr id="31" name="Text 28"/>
           <p:cNvSpPr/>
           <p:nvPr/>
         </p:nvSpPr>
@@ -5709,7 +5805,7 @@
       </p:sp>
       <p:sp>
         <p:nvSpPr>
-          <p:cNvPr id="31" name="Shape 29"/>
+          <p:cNvPr id="32" name="Shape 29"/>
           <p:cNvSpPr/>
           <p:nvPr/>
         </p:nvSpPr>
@@ -5731,7 +5827,7 @@
       </p:sp>
       <p:sp>
         <p:nvSpPr>
-          <p:cNvPr id="32" name="Text 30"/>
+          <p:cNvPr id="33" name="Text 30"/>
           <p:cNvSpPr/>
           <p:nvPr/>
         </p:nvSpPr>
@@ -5770,7 +5866,7 @@
       </p:sp>
       <p:sp>
         <p:nvSpPr>
-          <p:cNvPr id="33" name="Text 31"/>
+          <p:cNvPr id="34" name="Text 31"/>
           <p:cNvSpPr/>
           <p:nvPr/>
         </p:nvSpPr>
@@ -5809,7 +5905,7 @@
       </p:sp>
       <p:sp>
         <p:nvSpPr>
-          <p:cNvPr id="34" name="Shape 32"/>
+          <p:cNvPr id="35" name="Shape 32"/>
           <p:cNvSpPr/>
           <p:nvPr/>
         </p:nvSpPr>
@@ -5831,7 +5927,7 @@
       </p:sp>
       <p:sp>
         <p:nvSpPr>
-          <p:cNvPr id="35" name="Text 33"/>
+          <p:cNvPr id="36" name="Text 33"/>
           <p:cNvSpPr/>
           <p:nvPr/>
         </p:nvSpPr>
@@ -5870,7 +5966,7 @@
       </p:sp>
       <p:sp>
         <p:nvSpPr>
-          <p:cNvPr id="36" name="Text 34"/>
+          <p:cNvPr id="37" name="Text 34"/>
           <p:cNvSpPr/>
           <p:nvPr/>
         </p:nvSpPr>
@@ -5909,7 +6005,7 @@
       </p:sp>
       <p:sp>
         <p:nvSpPr>
-          <p:cNvPr id="37" name="Shape 35"/>
+          <p:cNvPr id="38" name="Shape 35"/>
           <p:cNvSpPr/>
           <p:nvPr/>
         </p:nvSpPr>
@@ -5931,7 +6027,7 @@
       </p:sp>
       <p:sp>
         <p:nvSpPr>
-          <p:cNvPr id="38" name="Text 36"/>
+          <p:cNvPr id="39" name="Text 36"/>
           <p:cNvSpPr/>
           <p:nvPr/>
         </p:nvSpPr>
@@ -5970,7 +6066,7 @@
       </p:sp>
       <p:sp>
         <p:nvSpPr>
-          <p:cNvPr id="39" name="Text 37"/>
+          <p:cNvPr id="40" name="Text 37"/>
           <p:cNvSpPr/>
           <p:nvPr/>
         </p:nvSpPr>
@@ -6009,7 +6105,7 @@
       </p:sp>
       <p:sp>
         <p:nvSpPr>
-          <p:cNvPr id="40" name="Shape 38"/>
+          <p:cNvPr id="41" name="Shape 38"/>
           <p:cNvSpPr/>
           <p:nvPr/>
         </p:nvSpPr>
@@ -6031,7 +6127,7 @@
       </p:sp>
       <p:sp>
         <p:nvSpPr>
-          <p:cNvPr id="41" name="Text 39"/>
+          <p:cNvPr id="42" name="Text 39"/>
           <p:cNvSpPr/>
           <p:nvPr/>
         </p:nvSpPr>
@@ -6070,7 +6166,7 @@
       </p:sp>
       <p:sp>
         <p:nvSpPr>
-          <p:cNvPr id="42" name="Text 40"/>
+          <p:cNvPr id="43" name="Text 40"/>
           <p:cNvSpPr/>
           <p:nvPr/>
         </p:nvSpPr>
@@ -6112,7 +6208,7 @@
       </p:sp>
       <p:sp>
         <p:nvSpPr>
-          <p:cNvPr id="43" name="Text 41"/>
+          <p:cNvPr id="44" name="Text 41"/>
           <p:cNvSpPr/>
           <p:nvPr/>
         </p:nvSpPr>
@@ -6151,7 +6247,7 @@
       </p:sp>
       <p:sp>
         <p:nvSpPr>
-          <p:cNvPr id="44" name="Text 42"/>
+          <p:cNvPr id="45" name="Text 42"/>
           <p:cNvSpPr/>
           <p:nvPr/>
         </p:nvSpPr>
@@ -6220,15 +6316,39 @@
           <a:chExt cx="0" cy="0"/>
         </a:xfrm>
       </p:grpSpPr>
-      <p:sp>
-        <p:nvSpPr>
-          <p:cNvPr id="2" name="Text 0"/>
-          <p:cNvSpPr/>
-          <p:nvPr/>
-        </p:nvSpPr>
-        <p:spPr>
-          <a:xfrm>
-            <a:off x="502920" y="292608"/>
+      <p:pic>
+        <p:nvPicPr>
+          <p:cNvPr id="2" name="Image 0" descr="preencoded.png">    </p:cNvPr>
+          <p:cNvPicPr>
+            <a:picLocks noChangeAspect="1"/>
+          </p:cNvPicPr>
+          <p:nvPr/>
+        </p:nvPicPr>
+        <p:blipFill>
+          <a:blip r:embed="rId1"/>
+          <a:stretch>
+            <a:fillRect/>
+          </a:stretch>
+        </p:blipFill>
+        <p:spPr>
+          <a:xfrm>
+            <a:off x="502920" y="228600"/>
+            <a:ext cx="329184" cy="292608"/>
+          </a:xfrm>
+          <a:prstGeom prst="rect">
+            <a:avLst/>
+          </a:prstGeom>
+        </p:spPr>
+      </p:pic>
+      <p:sp>
+        <p:nvSpPr>
+          <p:cNvPr id="3" name="Text 0"/>
+          <p:cNvSpPr/>
+          <p:nvPr/>
+        </p:nvSpPr>
+        <p:spPr>
+          <a:xfrm>
+            <a:off x="932688" y="292608"/>
             <a:ext cx="3657600" cy="274320"/>
           </a:xfrm>
           <a:prstGeom prst="rect">
@@ -6261,7 +6381,7 @@
       </p:sp>
       <p:sp>
         <p:nvSpPr>
-          <p:cNvPr id="3" name="Text 1"/>
+          <p:cNvPr id="4" name="Text 1"/>
           <p:cNvSpPr/>
           <p:nvPr/>
         </p:nvSpPr>
@@ -6300,7 +6420,7 @@
       </p:sp>
       <p:sp>
         <p:nvSpPr>
-          <p:cNvPr id="4" name="Text 2"/>
+          <p:cNvPr id="5" name="Text 2"/>
           <p:cNvSpPr/>
           <p:nvPr/>
         </p:nvSpPr>
@@ -6339,7 +6459,7 @@
       </p:sp>
       <p:sp>
         <p:nvSpPr>
-          <p:cNvPr id="5" name="Shape 3"/>
+          <p:cNvPr id="6" name="Shape 3"/>
           <p:cNvSpPr/>
           <p:nvPr/>
         </p:nvSpPr>
@@ -6366,7 +6486,7 @@
       </p:sp>
       <p:sp>
         <p:nvSpPr>
-          <p:cNvPr id="6" name="Text 4"/>
+          <p:cNvPr id="7" name="Text 4"/>
           <p:cNvSpPr/>
           <p:nvPr/>
         </p:nvSpPr>
@@ -6405,7 +6525,7 @@
       </p:sp>
       <p:sp>
         <p:nvSpPr>
-          <p:cNvPr id="7" name="Text 5"/>
+          <p:cNvPr id="8" name="Text 5"/>
           <p:cNvSpPr/>
           <p:nvPr/>
         </p:nvSpPr>
@@ -6444,7 +6564,7 @@
       </p:sp>
       <p:sp>
         <p:nvSpPr>
-          <p:cNvPr id="8" name="Text 6"/>
+          <p:cNvPr id="9" name="Text 6"/>
           <p:cNvSpPr/>
           <p:nvPr/>
         </p:nvSpPr>
@@ -6538,7 +6658,7 @@
       </p:sp>
       <p:sp>
         <p:nvSpPr>
-          <p:cNvPr id="9" name="Shape 7"/>
+          <p:cNvPr id="10" name="Shape 7"/>
           <p:cNvSpPr/>
           <p:nvPr/>
         </p:nvSpPr>
@@ -6565,7 +6685,7 @@
       </p:sp>
       <p:sp>
         <p:nvSpPr>
-          <p:cNvPr id="10" name="Text 8"/>
+          <p:cNvPr id="11" name="Text 8"/>
           <p:cNvSpPr/>
           <p:nvPr/>
         </p:nvSpPr>
@@ -6604,7 +6724,7 @@
       </p:sp>
       <p:sp>
         <p:nvSpPr>
-          <p:cNvPr id="11" name="Text 9"/>
+          <p:cNvPr id="12" name="Text 9"/>
           <p:cNvSpPr/>
           <p:nvPr/>
         </p:nvSpPr>
@@ -6643,7 +6763,7 @@
       </p:sp>
       <p:sp>
         <p:nvSpPr>
-          <p:cNvPr id="12" name="Text 10"/>
+          <p:cNvPr id="13" name="Text 10"/>
           <p:cNvSpPr/>
           <p:nvPr/>
         </p:nvSpPr>
@@ -6737,7 +6857,7 @@
       </p:sp>
       <p:sp>
         <p:nvSpPr>
-          <p:cNvPr id="13" name="Shape 11"/>
+          <p:cNvPr id="14" name="Shape 11"/>
           <p:cNvSpPr/>
           <p:nvPr/>
         </p:nvSpPr>
@@ -6764,7 +6884,7 @@
       </p:sp>
       <p:sp>
         <p:nvSpPr>
-          <p:cNvPr id="14" name="Text 12"/>
+          <p:cNvPr id="15" name="Text 12"/>
           <p:cNvSpPr/>
           <p:nvPr/>
         </p:nvSpPr>
@@ -6803,7 +6923,7 @@
       </p:sp>
       <p:sp>
         <p:nvSpPr>
-          <p:cNvPr id="15" name="Text 13"/>
+          <p:cNvPr id="16" name="Text 13"/>
           <p:cNvSpPr/>
           <p:nvPr/>
         </p:nvSpPr>
@@ -6842,7 +6962,7 @@
       </p:sp>
       <p:sp>
         <p:nvSpPr>
-          <p:cNvPr id="16" name="Text 14"/>
+          <p:cNvPr id="17" name="Text 14"/>
           <p:cNvSpPr/>
           <p:nvPr/>
         </p:nvSpPr>
@@ -6936,7 +7056,7 @@
       </p:sp>
       <p:sp>
         <p:nvSpPr>
-          <p:cNvPr id="17" name="Shape 15"/>
+          <p:cNvPr id="18" name="Shape 15"/>
           <p:cNvSpPr/>
           <p:nvPr/>
         </p:nvSpPr>
@@ -6958,7 +7078,7 @@
       </p:sp>
       <p:sp>
         <p:nvSpPr>
-          <p:cNvPr id="18" name="Text 16"/>
+          <p:cNvPr id="19" name="Text 16"/>
           <p:cNvSpPr/>
           <p:nvPr/>
         </p:nvSpPr>
@@ -6997,7 +7117,7 @@
       </p:sp>
       <p:sp>
         <p:nvSpPr>
-          <p:cNvPr id="19" name="Text 17"/>
+          <p:cNvPr id="20" name="Text 17"/>
           <p:cNvSpPr/>
           <p:nvPr/>
         </p:nvSpPr>
@@ -7155,7 +7275,7 @@
       </p:sp>
       <p:sp>
         <p:nvSpPr>
-          <p:cNvPr id="20" name="Shape 18"/>
+          <p:cNvPr id="21" name="Shape 18"/>
           <p:cNvSpPr/>
           <p:nvPr/>
         </p:nvSpPr>
@@ -7177,7 +7297,7 @@
       </p:sp>
       <p:sp>
         <p:nvSpPr>
-          <p:cNvPr id="21" name="Text 19"/>
+          <p:cNvPr id="22" name="Text 19"/>
           <p:cNvSpPr/>
           <p:nvPr/>
         </p:nvSpPr>
@@ -7236,7 +7356,7 @@
       </p:sp>
       <p:sp>
         <p:nvSpPr>
-          <p:cNvPr id="22" name="Text 20"/>
+          <p:cNvPr id="23" name="Text 20"/>
           <p:cNvSpPr/>
           <p:nvPr/>
         </p:nvSpPr>
@@ -7275,7 +7395,7 @@
       </p:sp>
       <p:sp>
         <p:nvSpPr>
-          <p:cNvPr id="23" name="Text 21"/>
+          <p:cNvPr id="24" name="Text 21"/>
           <p:cNvSpPr/>
           <p:nvPr/>
         </p:nvSpPr>
@@ -7436,15 +7556,39 @@
           <a:ln/>
         </p:spPr>
       </p:sp>
-      <p:sp>
-        <p:nvSpPr>
-          <p:cNvPr id="6" name="Text 4"/>
-          <p:cNvSpPr/>
-          <p:nvPr/>
-        </p:nvSpPr>
-        <p:spPr>
-          <a:xfrm>
-            <a:off x="777240" y="548640"/>
+      <p:pic>
+        <p:nvPicPr>
+          <p:cNvPr id="6" name="Image 0" descr="preencoded.png">    </p:cNvPr>
+          <p:cNvPicPr>
+            <a:picLocks noChangeAspect="1"/>
+          </p:cNvPicPr>
+          <p:nvPr/>
+        </p:nvPicPr>
+        <p:blipFill>
+          <a:blip r:embed="rId1"/>
+          <a:stretch>
+            <a:fillRect/>
+          </a:stretch>
+        </p:blipFill>
+        <p:spPr>
+          <a:xfrm>
+            <a:off x="777240" y="484632"/>
+            <a:ext cx="429768" cy="384048"/>
+          </a:xfrm>
+          <a:prstGeom prst="rect">
+            <a:avLst/>
+          </a:prstGeom>
+        </p:spPr>
+      </p:pic>
+      <p:sp>
+        <p:nvSpPr>
+          <p:cNvPr id="7" name="Text 4"/>
+          <p:cNvSpPr/>
+          <p:nvPr/>
+        </p:nvSpPr>
+        <p:spPr>
+          <a:xfrm>
+            <a:off x="1344168" y="521208"/>
             <a:ext cx="5486400" cy="320040"/>
           </a:xfrm>
           <a:prstGeom prst="rect">
@@ -7477,7 +7621,7 @@
       </p:sp>
       <p:sp>
         <p:nvSpPr>
-          <p:cNvPr id="7" name="Text 5"/>
+          <p:cNvPr id="8" name="Text 5"/>
           <p:cNvSpPr/>
           <p:nvPr/>
         </p:nvSpPr>
@@ -7572,7 +7716,7 @@
       </p:sp>
       <p:sp>
         <p:nvSpPr>
-          <p:cNvPr id="8" name="Text 6"/>
+          <p:cNvPr id="9" name="Text 6"/>
           <p:cNvSpPr/>
           <p:nvPr/>
         </p:nvSpPr>
@@ -7611,7 +7755,7 @@
       </p:sp>
       <p:sp>
         <p:nvSpPr>
-          <p:cNvPr id="9" name="Text 7"/>
+          <p:cNvPr id="10" name="Text 7"/>
           <p:cNvSpPr/>
           <p:nvPr/>
         </p:nvSpPr>
@@ -7664,7 +7808,7 @@
       </p:sp>
       <p:sp>
         <p:nvSpPr>
-          <p:cNvPr id="10" name="Text 8"/>
+          <p:cNvPr id="11" name="Text 8"/>
           <p:cNvSpPr/>
           <p:nvPr/>
         </p:nvSpPr>
@@ -7703,7 +7847,7 @@
       </p:sp>
       <p:sp>
         <p:nvSpPr>
-          <p:cNvPr id="11" name="Text 9"/>
+          <p:cNvPr id="12" name="Text 9"/>
           <p:cNvSpPr/>
           <p:nvPr/>
         </p:nvSpPr>
@@ -7756,7 +7900,7 @@
       </p:sp>
       <p:sp>
         <p:nvSpPr>
-          <p:cNvPr id="12" name="Text 10"/>
+          <p:cNvPr id="13" name="Text 10"/>
           <p:cNvSpPr/>
           <p:nvPr/>
         </p:nvSpPr>
@@ -7795,7 +7939,7 @@
       </p:sp>
       <p:sp>
         <p:nvSpPr>
-          <p:cNvPr id="13" name="Text 11"/>
+          <p:cNvPr id="14" name="Text 11"/>
           <p:cNvSpPr/>
           <p:nvPr/>
         </p:nvSpPr>
@@ -7848,7 +7992,7 @@
       </p:sp>
       <p:sp>
         <p:nvSpPr>
-          <p:cNvPr id="14" name="Text 12"/>
+          <p:cNvPr id="15" name="Text 12"/>
           <p:cNvSpPr/>
           <p:nvPr/>
         </p:nvSpPr>
@@ -7887,7 +8031,7 @@
       </p:sp>
       <p:sp>
         <p:nvSpPr>
-          <p:cNvPr id="15" name="Text 13"/>
+          <p:cNvPr id="16" name="Text 13"/>
           <p:cNvSpPr/>
           <p:nvPr/>
         </p:nvSpPr>
@@ -7940,7 +8084,7 @@
       </p:sp>
       <p:sp>
         <p:nvSpPr>
-          <p:cNvPr id="16" name="Text 14"/>
+          <p:cNvPr id="17" name="Text 14"/>
           <p:cNvSpPr/>
           <p:nvPr/>
         </p:nvSpPr>
@@ -7979,7 +8123,7 @@
       </p:sp>
       <p:sp>
         <p:nvSpPr>
-          <p:cNvPr id="17" name="Text 15"/>
+          <p:cNvPr id="18" name="Text 15"/>
           <p:cNvSpPr/>
           <p:nvPr/>
         </p:nvSpPr>
@@ -8032,7 +8176,7 @@
       </p:sp>
       <p:sp>
         <p:nvSpPr>
-          <p:cNvPr id="18" name="Shape 16"/>
+          <p:cNvPr id="19" name="Shape 16"/>
           <p:cNvSpPr/>
           <p:nvPr/>
         </p:nvSpPr>
@@ -8055,7 +8199,7 @@
       </p:sp>
       <p:sp>
         <p:nvSpPr>
-          <p:cNvPr id="19" name="Text 17"/>
+          <p:cNvPr id="20" name="Text 17"/>
           <p:cNvSpPr/>
           <p:nvPr/>
         </p:nvSpPr>
@@ -8094,7 +8238,7 @@
       </p:sp>
       <p:sp>
         <p:nvSpPr>
-          <p:cNvPr id="20" name="Text 18"/>
+          <p:cNvPr id="21" name="Text 18"/>
           <p:cNvSpPr/>
           <p:nvPr/>
         </p:nvSpPr>

--- a/Dynamic_Industry_Elevator_Deck_EN.pptx
+++ b/Dynamic_Industry_Elevator_Deck_EN.pptx
@@ -2360,7 +2360,7 @@
                 <a:ea typeface="Calibri" pitchFamily="34" charset="-122"/>
                 <a:cs typeface="Calibri" pitchFamily="34" charset="-120"/>
               </a:rPr>
-              <a:t>Myung-geun Jung, Co-founder   ·   Aug 2026   ·   For investment review only</a:t>
+              <a:t>Jason Jeong, Co-founder   ·   Aug 2026   ·   For investment review only</a:t>
             </a:r>
             <a:endParaRPr lang="en-US" sz="950" dirty="0"/>
           </a:p>
@@ -8269,7 +8269,7 @@
                 <a:ea typeface="Calibri" pitchFamily="34" charset="-122"/>
                 <a:cs typeface="Calibri" pitchFamily="34" charset="-120"/>
               </a:rPr>
-              <a:t>Myung-geun Jung, Co-founder · jmk4893@dynamicindustry.kr</a:t>
+              <a:t>Jason Jeong, Co-founder · jmk4893@dynamicindustry.kr</a:t>
             </a:r>
             <a:endParaRPr lang="en-US" sz="1050" dirty="0"/>
           </a:p>
